--- a/代码/figures/论文数据图/问题一/第一问_技术路线图_参考风格.pptx
+++ b/代码/figures/论文数据图/问题一/第一问_技术路线图_参考风格.pptx
@@ -1764,52 +1764,52 @@
             <a:noAutofit/>
           </a:bodyPr>
           <a:lstStyle xmlns:a="http://schemas.openxmlformats.org/drawingml/2006/main"/>
-          <a:p xmlns:a="http://schemas.openxmlformats.org/drawingml/2006/main">
-            <a:pPr algn="ctr">
-              <a:defRPr sz="1650" b="0">
-                <a:solidFill>
-                  <a:srgbClr val="111111"/>
-                </a:solidFill>
-                <a:latin typeface="SimSun"/>
-                <a:ea typeface="SimSun"/>
-                <a:cs typeface="SimSun"/>
-              </a:defRPr>
-            </a:pPr>
-            <a:r>
-              <a:rPr sz="1650" b="0">
-                <a:solidFill>
-                  <a:srgbClr val="111111"/>
-                </a:solidFill>
-                <a:latin typeface="SimSun"/>
-                <a:ea typeface="SimSun"/>
-                <a:cs typeface="SimSun"/>
-              </a:rPr>
-              <a:t>净负荷</a:t>
-            </a:r>
-          </a:p>
-          <a:p xmlns:a="http://schemas.openxmlformats.org/drawingml/2006/main">
-            <a:pPr algn="ctr">
-              <a:defRPr sz="1650" b="0">
-                <a:solidFill>
-                  <a:srgbClr val="111111"/>
-                </a:solidFill>
-                <a:latin typeface="SimSun"/>
-                <a:ea typeface="SimSun"/>
-                <a:cs typeface="SimSun"/>
-              </a:defRPr>
-            </a:pPr>
-            <a:r>
-              <a:rPr sz="1650" b="0">
-                <a:solidFill>
-                  <a:srgbClr val="111111"/>
-                </a:solidFill>
-                <a:latin typeface="SimSun"/>
-                <a:ea typeface="SimSun"/>
-                <a:cs typeface="SimSun"/>
-              </a:rPr>
-              <a:t>L − V（kW）</a:t>
-            </a:r>
-          </a:p>
+          <ns0:p xmlns:ns0="http://schemas.openxmlformats.org/drawingml/2006/main">
+            <ns0:pPr algn="ctr">
+              <ns0:defRPr sz="1650" b="0">
+                <ns0:solidFill>
+                  <ns0:srgbClr val="111111"/>
+                </ns0:solidFill>
+                <ns0:latin typeface="SimSun"/>
+                <ns0:ea typeface="SimSun"/>
+                <ns0:cs typeface="SimSun"/>
+              </ns0:defRPr>
+            </ns0:pPr>
+            <ns0:r>
+              <ns0:rPr sz="1650" b="0">
+                <ns0:solidFill>
+                  <ns0:srgbClr val="111111"/>
+                </ns0:solidFill>
+                <ns0:latin typeface="SimSun"/>
+                <ns0:ea typeface="SimSun"/>
+                <ns0:cs typeface="SimSun"/>
+              </ns0:rPr>
+              <ns0:t>净负荷</ns0:t>
+            </ns0:r>
+          </ns0:p>
+          <ns1:p xmlns:ns1="http://schemas.openxmlformats.org/drawingml/2006/main">
+            <ns1:pPr algn="ctr">
+              <ns1:defRPr sz="1650" b="0">
+                <ns1:solidFill>
+                  <ns1:srgbClr val="111111"/>
+                </ns1:solidFill>
+                <ns1:latin typeface="SimSun"/>
+                <ns1:ea typeface="SimSun"/>
+                <ns1:cs typeface="SimSun"/>
+              </ns1:defRPr>
+            </ns1:pPr>
+            <ns1:r>
+              <ns1:rPr sz="1650" b="0">
+                <ns1:solidFill>
+                  <ns1:srgbClr val="111111"/>
+                </ns1:solidFill>
+                <ns1:latin typeface="SimSun"/>
+                <ns1:ea typeface="SimSun"/>
+                <ns1:cs typeface="SimSun"/>
+              </ns1:rPr>
+              <ns1:t>负荷扣光伏</ns1:t>
+            </ns1:r>
+          </ns1:p>
         </p:txBody>
       </p:sp>
       <p:sp>
@@ -1848,52 +1848,52 @@
             <a:noAutofit/>
           </a:bodyPr>
           <a:lstStyle xmlns:a="http://schemas.openxmlformats.org/drawingml/2006/main"/>
-          <a:p xmlns:a="http://schemas.openxmlformats.org/drawingml/2006/main">
-            <a:pPr algn="ctr">
-              <a:defRPr sz="1650" b="0">
-                <a:solidFill>
-                  <a:srgbClr val="111111"/>
-                </a:solidFill>
-                <a:latin typeface="SimSun"/>
-                <a:ea typeface="SimSun"/>
-                <a:cs typeface="SimSun"/>
-              </a:defRPr>
-            </a:pPr>
-            <a:r>
-              <a:rPr sz="1650" b="0">
-                <a:solidFill>
-                  <a:srgbClr val="111111"/>
-                </a:solidFill>
-                <a:latin typeface="SimSun"/>
-                <a:ea typeface="SimSun"/>
-                <a:cs typeface="SimSun"/>
-              </a:rPr>
-              <a:t>时间离散</a:t>
-            </a:r>
-          </a:p>
-          <a:p xmlns:a="http://schemas.openxmlformats.org/drawingml/2006/main">
-            <a:pPr algn="ctr">
-              <a:defRPr sz="1650" b="0">
-                <a:solidFill>
-                  <a:srgbClr val="111111"/>
-                </a:solidFill>
-                <a:latin typeface="SimSun"/>
-                <a:ea typeface="SimSun"/>
-                <a:cs typeface="SimSun"/>
-              </a:defRPr>
-            </a:pPr>
-            <a:r>
-              <a:rPr sz="1650" b="0">
-                <a:solidFill>
-                  <a:srgbClr val="111111"/>
-                </a:solidFill>
-                <a:latin typeface="SimSun"/>
-                <a:ea typeface="SimSun"/>
-                <a:cs typeface="SimSun"/>
-              </a:rPr>
-              <a:t>144×10 min</a:t>
-            </a:r>
-          </a:p>
+          <ns2:p xmlns:ns2="http://schemas.openxmlformats.org/drawingml/2006/main">
+            <ns2:pPr algn="ctr">
+              <ns2:defRPr sz="1650" b="0">
+                <ns2:solidFill>
+                  <ns2:srgbClr val="111111"/>
+                </ns2:solidFill>
+                <ns2:latin typeface="SimSun"/>
+                <ns2:ea typeface="SimSun"/>
+                <ns2:cs typeface="SimSun"/>
+              </ns2:defRPr>
+            </ns2:pPr>
+            <ns2:r>
+              <ns2:rPr sz="1650" b="0">
+                <ns2:solidFill>
+                  <ns2:srgbClr val="111111"/>
+                </ns2:solidFill>
+                <ns2:latin typeface="SimSun"/>
+                <ns2:ea typeface="SimSun"/>
+                <ns2:cs typeface="SimSun"/>
+              </ns2:rPr>
+              <ns2:t>时间离散</ns2:t>
+            </ns2:r>
+          </ns2:p>
+          <ns3:p xmlns:ns3="http://schemas.openxmlformats.org/drawingml/2006/main">
+            <ns3:pPr algn="ctr">
+              <ns3:defRPr sz="1650" b="0">
+                <ns3:solidFill>
+                  <ns3:srgbClr val="111111"/>
+                </ns3:solidFill>
+                <ns3:latin typeface="SimSun"/>
+                <ns3:ea typeface="SimSun"/>
+                <ns3:cs typeface="SimSun"/>
+              </ns3:defRPr>
+            </ns3:pPr>
+            <ns3:r>
+              <ns3:rPr sz="1650" b="0">
+                <ns3:solidFill>
+                  <ns3:srgbClr val="111111"/>
+                </ns3:solidFill>
+                <ns3:latin typeface="SimSun"/>
+                <ns3:ea typeface="SimSun"/>
+                <ns3:cs typeface="SimSun"/>
+              </ns3:rPr>
+              <ns3:t>十分钟一段</ns3:t>
+            </ns3:r>
+          </ns3:p>
         </p:txBody>
       </p:sp>
       <p:sp>
@@ -1932,52 +1932,52 @@
             <a:noAutofit/>
           </a:bodyPr>
           <a:lstStyle xmlns:a="http://schemas.openxmlformats.org/drawingml/2006/main"/>
-          <a:p xmlns:a="http://schemas.openxmlformats.org/drawingml/2006/main">
-            <a:pPr algn="ctr">
-              <a:defRPr sz="1650" b="0">
-                <a:solidFill>
-                  <a:srgbClr val="111111"/>
-                </a:solidFill>
-                <a:latin typeface="SimSun"/>
-                <a:ea typeface="SimSun"/>
-                <a:cs typeface="SimSun"/>
-              </a:defRPr>
-            </a:pPr>
-            <a:r>
-              <a:rPr sz="1650" b="0">
-                <a:solidFill>
-                  <a:srgbClr val="111111"/>
-                </a:solidFill>
-                <a:latin typeface="SimSun"/>
-                <a:ea typeface="SimSun"/>
-                <a:cs typeface="SimSun"/>
-              </a:rPr>
-              <a:t>功率转电量</a:t>
-            </a:r>
-          </a:p>
-          <a:p xmlns:a="http://schemas.openxmlformats.org/drawingml/2006/main">
-            <a:pPr algn="ctr">
-              <a:defRPr sz="1650" b="0">
-                <a:solidFill>
-                  <a:srgbClr val="111111"/>
-                </a:solidFill>
-                <a:latin typeface="SimSun"/>
-                <a:ea typeface="SimSun"/>
-                <a:cs typeface="SimSun"/>
-              </a:defRPr>
-            </a:pPr>
-            <a:r>
-              <a:rPr sz="1650" b="0">
-                <a:solidFill>
-                  <a:srgbClr val="111111"/>
-                </a:solidFill>
-                <a:latin typeface="SimSun"/>
-                <a:ea typeface="SimSun"/>
-                <a:cs typeface="SimSun"/>
-              </a:rPr>
-              <a:t>Δt = 1/6 h，变量统一按 kWh</a:t>
-            </a:r>
-          </a:p>
+          <ns4:p xmlns:ns4="http://schemas.openxmlformats.org/drawingml/2006/main">
+            <ns4:pPr algn="ctr">
+              <ns4:defRPr sz="1650" b="0">
+                <ns4:solidFill>
+                  <ns4:srgbClr val="111111"/>
+                </ns4:solidFill>
+                <ns4:latin typeface="SimSun"/>
+                <ns4:ea typeface="SimSun"/>
+                <ns4:cs typeface="SimSun"/>
+              </ns4:defRPr>
+            </ns4:pPr>
+            <ns4:r>
+              <ns4:rPr sz="1650" b="0">
+                <ns4:solidFill>
+                  <ns4:srgbClr val="111111"/>
+                </ns4:solidFill>
+                <ns4:latin typeface="SimSun"/>
+                <ns4:ea typeface="SimSun"/>
+                <ns4:cs typeface="SimSun"/>
+              </ns4:rPr>
+              <ns4:t>功率转电量</ns4:t>
+            </ns4:r>
+          </ns4:p>
+          <ns5:p xmlns:ns5="http://schemas.openxmlformats.org/drawingml/2006/main">
+            <ns5:pPr algn="ctr">
+              <ns5:defRPr sz="1650" b="0">
+                <ns5:solidFill>
+                  <ns5:srgbClr val="111111"/>
+                </ns5:solidFill>
+                <ns5:latin typeface="SimSun"/>
+                <ns5:ea typeface="SimSun"/>
+                <ns5:cs typeface="SimSun"/>
+              </ns5:defRPr>
+            </ns5:pPr>
+            <ns5:r>
+              <ns5:rPr sz="1650" b="0">
+                <ns5:solidFill>
+                  <ns5:srgbClr val="111111"/>
+                </ns5:solidFill>
+                <ns5:latin typeface="SimSun"/>
+                <ns5:ea typeface="SimSun"/>
+                <ns5:cs typeface="SimSun"/>
+              </ns5:rPr>
+              <ns5:t>按时段长度换算为千瓦时</ns5:t>
+            </ns5:r>
+          </ns5:p>
         </p:txBody>
       </p:sp>
       <p:sp>
@@ -2264,121 +2264,121 @@
             <a:noAutofit/>
           </a:bodyPr>
           <a:lstStyle xmlns:a="http://schemas.openxmlformats.org/drawingml/2006/main"/>
-          <a:p xmlns:a="http://schemas.openxmlformats.org/drawingml/2006/main">
-            <a:pPr algn="ctr">
-              <a:defRPr sz="1575" b="0">
-                <a:solidFill>
-                  <a:srgbClr val="111111"/>
-                </a:solidFill>
-                <a:latin typeface="SimSun"/>
-                <a:ea typeface="SimSun"/>
-                <a:cs typeface="SimSun"/>
-              </a:defRPr>
-            </a:pPr>
-            <a:r>
-              <a:rPr sz="1575" b="0">
-                <a:solidFill>
-                  <a:srgbClr val="111111"/>
-                </a:solidFill>
-                <a:latin typeface="SimSun"/>
-                <a:ea typeface="SimSun"/>
-                <a:cs typeface="SimSun"/>
-              </a:rPr>
-              <a:t>目标与决策变量</a:t>
-            </a:r>
-          </a:p>
-          <a:p xmlns:a="http://schemas.openxmlformats.org/drawingml/2006/main">
-            <a:pPr algn="ctr">
-              <a:defRPr sz="1575" b="0">
-                <a:solidFill>
-                  <a:srgbClr val="111111"/>
-                </a:solidFill>
-                <a:latin typeface="SimSun"/>
-                <a:ea typeface="SimSun"/>
-                <a:cs typeface="SimSun"/>
-              </a:defRPr>
-            </a:pPr>
-            <a:r>
-              <a:rPr sz="1575" b="0">
-                <a:solidFill>
-                  <a:srgbClr val="111111"/>
-                </a:solidFill>
-                <a:latin typeface="SimSun"/>
-                <a:ea typeface="SimSun"/>
-                <a:cs typeface="SimSun"/>
-              </a:rPr>
-              <a:t>min Σ pₜgₜ</a:t>
-            </a:r>
-          </a:p>
-          <a:p xmlns:a="http://schemas.openxmlformats.org/drawingml/2006/main">
-            <a:pPr algn="ctr">
-              <a:defRPr sz="1575" b="0">
-                <a:solidFill>
-                  <a:srgbClr val="111111"/>
-                </a:solidFill>
-                <a:latin typeface="SimSun"/>
-                <a:ea typeface="SimSun"/>
-                <a:cs typeface="SimSun"/>
-              </a:defRPr>
-            </a:pPr>
-            <a:r>
-              <a:rPr sz="1575" b="0">
-                <a:solidFill>
-                  <a:srgbClr val="111111"/>
-                </a:solidFill>
-                <a:latin typeface="SimSun"/>
-                <a:ea typeface="SimSun"/>
-                <a:cs typeface="SimSun"/>
-              </a:rPr>
-              <a:t>购电 g、充放电 c/d</a:t>
-            </a:r>
-          </a:p>
-          <a:p xmlns:a="http://schemas.openxmlformats.org/drawingml/2006/main">
-            <a:pPr algn="ctr">
-              <a:defRPr sz="1575" b="0">
-                <a:solidFill>
-                  <a:srgbClr val="111111"/>
-                </a:solidFill>
-                <a:latin typeface="SimSun"/>
-                <a:ea typeface="SimSun"/>
-                <a:cs typeface="SimSun"/>
-              </a:defRPr>
-            </a:pPr>
-            <a:r>
-              <a:rPr sz="1575" b="0">
-                <a:solidFill>
-                  <a:srgbClr val="111111"/>
-                </a:solidFill>
-                <a:latin typeface="SimSun"/>
-                <a:ea typeface="SimSun"/>
-                <a:cs typeface="SimSun"/>
-              </a:rPr>
-              <a:t>储电量 E、弃光 w</a:t>
-            </a:r>
-          </a:p>
-          <a:p xmlns:a="http://schemas.openxmlformats.org/drawingml/2006/main">
-            <a:pPr algn="ctr">
-              <a:defRPr sz="1575" b="0">
-                <a:solidFill>
-                  <a:srgbClr val="111111"/>
-                </a:solidFill>
-                <a:latin typeface="SimSun"/>
-                <a:ea typeface="SimSun"/>
-                <a:cs typeface="SimSun"/>
-              </a:defRPr>
-            </a:pPr>
-            <a:r>
-              <a:rPr sz="1575" b="0">
-                <a:solidFill>
-                  <a:srgbClr val="111111"/>
-                </a:solidFill>
-                <a:latin typeface="SimSun"/>
-                <a:ea typeface="SimSun"/>
-                <a:cs typeface="SimSun"/>
-              </a:rPr>
-              <a:t>互斥变量 z</a:t>
-            </a:r>
-          </a:p>
+          <ns6:p xmlns:ns6="http://schemas.openxmlformats.org/drawingml/2006/main">
+            <ns6:pPr algn="ctr">
+              <ns6:defRPr sz="1575" b="0">
+                <ns6:solidFill>
+                  <ns6:srgbClr val="111111"/>
+                </ns6:solidFill>
+                <ns6:latin typeface="SimSun"/>
+                <ns6:ea typeface="SimSun"/>
+                <ns6:cs typeface="SimSun"/>
+              </ns6:defRPr>
+            </ns6:pPr>
+            <ns6:r>
+              <ns6:rPr sz="1575" b="0">
+                <ns6:solidFill>
+                  <ns6:srgbClr val="111111"/>
+                </ns6:solidFill>
+                <ns6:latin typeface="SimSun"/>
+                <ns6:ea typeface="SimSun"/>
+                <ns6:cs typeface="SimSun"/>
+              </ns6:rPr>
+              <ns6:t>购电费用最小</ns6:t>
+            </ns6:r>
+          </ns6:p>
+          <ns7:p xmlns:ns7="http://schemas.openxmlformats.org/drawingml/2006/main">
+            <ns7:pPr algn="ctr">
+              <ns7:defRPr sz="1575" b="0">
+                <ns7:solidFill>
+                  <ns7:srgbClr val="111111"/>
+                </ns7:solidFill>
+                <ns7:latin typeface="SimSun"/>
+                <ns7:ea typeface="SimSun"/>
+                <ns7:cs typeface="SimSun"/>
+              </ns7:defRPr>
+            </ns7:pPr>
+            <ns7:r>
+              <ns7:rPr sz="1575" b="0">
+                <ns7:solidFill>
+                  <ns7:srgbClr val="111111"/>
+                </ns7:solidFill>
+                <ns7:latin typeface="SimSun"/>
+                <ns7:ea typeface="SimSun"/>
+                <ns7:cs typeface="SimSun"/>
+              </ns7:rPr>
+              <ns7:t>联合确定</ns7:t>
+            </ns7:r>
+          </ns7:p>
+          <ns8:p xmlns:ns8="http://schemas.openxmlformats.org/drawingml/2006/main">
+            <ns8:pPr algn="ctr">
+              <ns8:defRPr sz="1575" b="0">
+                <ns8:solidFill>
+                  <ns8:srgbClr val="111111"/>
+                </ns8:solidFill>
+                <ns8:latin typeface="SimSun"/>
+                <ns8:ea typeface="SimSun"/>
+                <ns8:cs typeface="SimSun"/>
+              </ns8:defRPr>
+            </ns8:pPr>
+            <ns8:r>
+              <ns8:rPr sz="1575" b="0">
+                <ns8:solidFill>
+                  <ns8:srgbClr val="111111"/>
+                </ns8:solidFill>
+                <ns8:latin typeface="SimSun"/>
+                <ns8:ea typeface="SimSun"/>
+                <ns8:cs typeface="SimSun"/>
+              </ns8:rPr>
+              <ns8:t>购电与充放电</ns8:t>
+            </ns8:r>
+          </ns8:p>
+          <ns9:p xmlns:ns9="http://schemas.openxmlformats.org/drawingml/2006/main">
+            <ns9:pPr algn="ctr">
+              <ns9:defRPr sz="1575" b="0">
+                <ns9:solidFill>
+                  <ns9:srgbClr val="111111"/>
+                </ns9:solidFill>
+                <ns9:latin typeface="SimSun"/>
+                <ns9:ea typeface="SimSun"/>
+                <ns9:cs typeface="SimSun"/>
+              </ns9:defRPr>
+            </ns9:pPr>
+            <ns9:r>
+              <ns9:rPr sz="1575" b="0">
+                <ns9:solidFill>
+                  <ns9:srgbClr val="111111"/>
+                </ns9:solidFill>
+                <ns9:latin typeface="SimSun"/>
+                <ns9:ea typeface="SimSun"/>
+                <ns9:cs typeface="SimSun"/>
+              </ns9:rPr>
+              <ns9:t>储电量与弃光</ns9:t>
+            </ns9:r>
+          </ns9:p>
+          <ns10:p xmlns:ns10="http://schemas.openxmlformats.org/drawingml/2006/main">
+            <ns10:pPr algn="ctr">
+              <ns10:defRPr sz="1575" b="0">
+                <ns10:solidFill>
+                  <ns10:srgbClr val="111111"/>
+                </ns10:solidFill>
+                <ns10:latin typeface="SimSun"/>
+                <ns10:ea typeface="SimSun"/>
+                <ns10:cs typeface="SimSun"/>
+              </ns10:defRPr>
+            </ns10:pPr>
+            <ns10:r>
+              <ns10:rPr sz="1575" b="0">
+                <ns10:solidFill>
+                  <ns10:srgbClr val="111111"/>
+                </ns10:solidFill>
+                <ns10:latin typeface="SimSun"/>
+                <ns10:ea typeface="SimSun"/>
+                <ns10:cs typeface="SimSun"/>
+              </ns10:rPr>
+              <ns10:t>充放电互斥状态</ns10:t>
+            </ns10:r>
+          </ns10:p>
         </p:txBody>
       </p:sp>
       <p:sp>
@@ -2593,98 +2593,98 @@
             <a:noAutofit/>
           </a:bodyPr>
           <a:lstStyle xmlns:a="http://schemas.openxmlformats.org/drawingml/2006/main"/>
-          <a:p xmlns:a="http://schemas.openxmlformats.org/drawingml/2006/main">
-            <a:pPr algn="ctr">
-              <a:defRPr sz="1650" b="0">
-                <a:solidFill>
-                  <a:srgbClr val="111111"/>
-                </a:solidFill>
-                <a:latin typeface="SimSun"/>
-                <a:ea typeface="SimSun"/>
-                <a:cs typeface="SimSun"/>
-              </a:defRPr>
-            </a:pPr>
-            <a:r>
-              <a:rPr sz="1650" b="0">
-                <a:solidFill>
-                  <a:srgbClr val="111111"/>
-                </a:solidFill>
-                <a:latin typeface="SimSun"/>
-                <a:ea typeface="SimSun"/>
-                <a:cs typeface="SimSun"/>
-              </a:rPr>
-              <a:t>构建日循环 MILP</a:t>
-            </a:r>
-          </a:p>
-          <a:p xmlns:a="http://schemas.openxmlformats.org/drawingml/2006/main">
-            <a:pPr algn="ctr">
-              <a:defRPr sz="1650" b="0">
-                <a:solidFill>
-                  <a:srgbClr val="111111"/>
-                </a:solidFill>
-                <a:latin typeface="SimSun"/>
-                <a:ea typeface="SimSun"/>
-                <a:cs typeface="SimSun"/>
-              </a:defRPr>
-            </a:pPr>
-            <a:r>
-              <a:rPr sz="1650" b="0">
-                <a:solidFill>
-                  <a:srgbClr val="111111"/>
-                </a:solidFill>
-                <a:latin typeface="SimSun"/>
-                <a:ea typeface="SimSun"/>
-                <a:cs typeface="SimSun"/>
-              </a:rPr>
-              <a:t>E₀ = E₁₄₄</a:t>
-            </a:r>
-          </a:p>
-          <a:p xmlns:a="http://schemas.openxmlformats.org/drawingml/2006/main">
-            <a:pPr algn="ctr">
-              <a:defRPr sz="1650" b="0">
-                <a:solidFill>
-                  <a:srgbClr val="111111"/>
-                </a:solidFill>
-                <a:latin typeface="SimSun"/>
-                <a:ea typeface="SimSun"/>
-                <a:cs typeface="SimSun"/>
-              </a:defRPr>
-            </a:pPr>
-            <a:r>
-              <a:rPr sz="1650" b="0">
-                <a:solidFill>
-                  <a:srgbClr val="111111"/>
-                </a:solidFill>
-                <a:latin typeface="SimSun"/>
-                <a:ea typeface="SimSun"/>
-                <a:cs typeface="SimSun"/>
-              </a:rPr>
-              <a:t>共同初末库存由优化决定</a:t>
-            </a:r>
-          </a:p>
-          <a:p xmlns:a="http://schemas.openxmlformats.org/drawingml/2006/main">
-            <a:pPr algn="ctr">
-              <a:defRPr sz="1650" b="0">
-                <a:solidFill>
-                  <a:srgbClr val="111111"/>
-                </a:solidFill>
-                <a:latin typeface="SimSun"/>
-                <a:ea typeface="SimSun"/>
-                <a:cs typeface="SimSun"/>
-              </a:defRPr>
-            </a:pPr>
-            <a:r>
-              <a:rPr sz="1650" b="0">
-                <a:solidFill>
-                  <a:srgbClr val="111111"/>
-                </a:solidFill>
-                <a:latin typeface="SimSun"/>
-                <a:ea typeface="SimSun"/>
-                <a:cs typeface="SimSun"/>
-              </a:rPr>
-              <a:t>不售电，允许弃光</a:t>
-            </a:r>
-          </a:p>
+          <ns11:p xmlns:ns11="http://schemas.openxmlformats.org/drawingml/2006/main">
+            <ns11:pPr algn="ctr">
+              <ns11:defRPr sz="1650" b="0">
+                <ns11:solidFill>
+                  <ns11:srgbClr val="111111"/>
+                </ns11:solidFill>
+                <ns11:latin typeface="SimSun"/>
+                <ns11:ea typeface="SimSun"/>
+                <ns11:cs typeface="SimSun"/>
+              </ns11:defRPr>
+            </ns11:pPr>
+            <ns11:r>
+              <ns11:rPr sz="1650" b="0">
+                <ns11:solidFill>
+                  <ns11:srgbClr val="111111"/>
+                </ns11:solidFill>
+                <ns11:latin typeface="SimSun"/>
+                <ns11:ea typeface="SimSun"/>
+                <ns11:cs typeface="SimSun"/>
+              </ns11:rPr>
+              <ns11:t>构建日循环混合整数规划</ns11:t>
+            </ns11:r>
+          </ns11:p>
+          <ns12:p xmlns:ns12="http://schemas.openxmlformats.org/drawingml/2006/main">
+            <ns12:pPr algn="ctr">
+              <ns12:defRPr sz="1650" b="0">
+                <ns12:solidFill>
+                  <ns12:srgbClr val="111111"/>
+                </ns12:solidFill>
+                <ns12:latin typeface="SimSun"/>
+                <ns12:ea typeface="SimSun"/>
+                <ns12:cs typeface="SimSun"/>
+              </ns12:defRPr>
+            </ns12:pPr>
+            <ns12:r>
+              <ns12:rPr sz="1650" b="0">
+                <ns12:solidFill>
+                  <ns12:srgbClr val="111111"/>
+                </ns12:solidFill>
+                <ns12:latin typeface="SimSun"/>
+                <ns12:ea typeface="SimSun"/>
+                <ns12:cs typeface="SimSun"/>
+              </ns12:rPr>
+              <ns12:t>日初与日末库存相同</ns12:t>
+            </ns12:r>
+          </ns12:p>
+          <ns13:p xmlns:ns13="http://schemas.openxmlformats.org/drawingml/2006/main">
+            <ns13:pPr algn="ctr">
+              <ns13:defRPr sz="1650" b="0">
+                <ns13:solidFill>
+                  <ns13:srgbClr val="111111"/>
+                </ns13:solidFill>
+                <ns13:latin typeface="SimSun"/>
+                <ns13:ea typeface="SimSun"/>
+                <ns13:cs typeface="SimSun"/>
+              </ns13:defRPr>
+            </ns13:pPr>
+            <ns13:r>
+              <ns13:rPr sz="1650" b="0">
+                <ns13:solidFill>
+                  <ns13:srgbClr val="111111"/>
+                </ns13:solidFill>
+                <ns13:latin typeface="SimSun"/>
+                <ns13:ea typeface="SimSun"/>
+                <ns13:cs typeface="SimSun"/>
+              </ns13:rPr>
+              <ns13:t>共同库存由优化确定</ns13:t>
+            </ns13:r>
+          </ns13:p>
+          <ns14:p xmlns:ns14="http://schemas.openxmlformats.org/drawingml/2006/main">
+            <ns14:pPr algn="ctr">
+              <ns14:defRPr sz="1650" b="0">
+                <ns14:solidFill>
+                  <ns14:srgbClr val="111111"/>
+                </ns14:solidFill>
+                <ns14:latin typeface="SimSun"/>
+                <ns14:ea typeface="SimSun"/>
+                <ns14:cs typeface="SimSun"/>
+              </ns14:defRPr>
+            </ns14:pPr>
+            <ns14:r>
+              <ns14:rPr sz="1650" b="0">
+                <ns14:solidFill>
+                  <ns14:srgbClr val="111111"/>
+                </ns14:solidFill>
+                <ns14:latin typeface="SimSun"/>
+                <ns14:ea typeface="SimSun"/>
+                <ns14:cs typeface="SimSun"/>
+              </ns14:rPr>
+              <ns14:t>允许弃光，不售电</ns14:t>
+            </ns14:r>
+          </ns14:p>
         </p:txBody>
       </p:sp>
       <p:cxnSp>
@@ -3579,29 +3579,29 @@
             <a:noAutofit/>
           </a:bodyPr>
           <a:lstStyle xmlns:a="http://schemas.openxmlformats.org/drawingml/2006/main"/>
-          <a:p xmlns:a="http://schemas.openxmlformats.org/drawingml/2006/main">
-            <a:pPr algn="ctr">
-              <a:defRPr sz="1575" b="0">
-                <a:solidFill>
-                  <a:srgbClr val="333333"/>
-                </a:solidFill>
-                <a:latin typeface="SimSun"/>
-                <a:ea typeface="SimSun"/>
-                <a:cs typeface="SimSun"/>
-              </a:defRPr>
-            </a:pPr>
-            <a:r>
-              <a:rPr sz="1575" b="0">
-                <a:solidFill>
-                  <a:srgbClr val="333333"/>
-                </a:solidFill>
-                <a:latin typeface="SimSun"/>
-                <a:ea typeface="SimSun"/>
-                <a:cs typeface="SimSun"/>
-              </a:rPr>
-              <a:t>已知预测条件下的日循环MILP；E₀=E₁₄₄且共同值由优化；储能1200–10800 kWh；不设紧急购电与售电</a:t>
-            </a:r>
-          </a:p>
+          <ns15:p xmlns:ns15="http://schemas.openxmlformats.org/drawingml/2006/main">
+            <ns15:pPr algn="ctr">
+              <ns15:defRPr sz="1575" b="0">
+                <ns15:solidFill>
+                  <ns15:srgbClr val="333333"/>
+                </ns15:solidFill>
+                <ns15:latin typeface="SimSun"/>
+                <ns15:ea typeface="SimSun"/>
+                <ns15:cs typeface="SimSun"/>
+              </ns15:defRPr>
+            </ns15:pPr>
+            <ns15:r>
+              <ns15:rPr sz="1575" b="0">
+                <ns15:solidFill>
+                  <ns15:srgbClr val="333333"/>
+                </ns15:solidFill>
+                <ns15:latin typeface="SimSun"/>
+                <ns15:ea typeface="SimSun"/>
+                <ns15:cs typeface="SimSun"/>
+              </ns15:rPr>
+              <ns15:t>已知预测条件下优化日循环储能；初末库存相同且共同优化；不设紧急购电与售电</ns15:t>
+            </ns15:r>
+          </ns15:p>
         </p:txBody>
       </p:sp>
     </p:spTree>
